--- a/materialien/Videos/07_Abi-Check/DD_Video07_Abi-Check_Folien.pptx
+++ b/materialien/Videos/07_Abi-Check/DD_Video07_Abi-Check_Folien.pptx
@@ -14970,7 +14970,7 @@
                 </a:solidFill>
                 <a:latin typeface="Barlow"/>
               </a:rPr>
-              <a:t>Finde alle Fallen</a:t>
+              <a:t>Analysiere</a:t>
             </a:r>
             <a:r>
               <a:rPr sz="2000" b="0" i="0" u="none">
@@ -14979,7 +14979,7 @@
                 </a:solidFill>
                 <a:latin typeface="Barlow"/>
               </a:rPr>
-              <a:t> in dieser Abfrage:</a:t>
+              <a:t> die Abfrage auf alle Fallen:</a:t>
             </a:r>
           </a:p>
         </p:txBody>
